--- a/assets/figures-editable/c3-c4/c4-e27.pptx
+++ b/assets/figures-editable/c3-c4/c4-e27.pptx
@@ -3104,8 +3104,8 @@
         </p:nvSpPr>
         <p:spPr>
           <a:xfrm>
-            <a:off x="274320" y="137160"/>
-            <a:ext cx="11612880" cy="365760"/>
+            <a:off x="274320" y="118872"/>
+            <a:ext cx="11612880" cy="340105"/>
           </a:xfrm>
           <a:prstGeom prst="rect">
             <a:avLst/>
@@ -3114,7 +3114,7 @@
           <a:effectLst/>
         </p:spPr>
         <p:txBody>
-          <a:bodyPr wrap="square" lIns="27432" rIns="27432" tIns="18288" bIns="18288" anchor="ctr">
+          <a:bodyPr wrap="none" lIns="18288" rIns="18288" tIns="18288" bIns="18288" anchor="t">
             <a:spAutoFit/>
           </a:bodyPr>
           <a:lstStyle/>
@@ -3125,7 +3125,7 @@
               </a:spcAft>
             </a:pPr>
             <a:r>
-              <a:rPr sz="2100" b="0" i="0">
+              <a:rPr sz="1900" b="1" i="0">
                 <a:solidFill>
                   <a:srgbClr val="8EDBD4"/>
                 </a:solidFill>
@@ -3136,130 +3136,16 @@
           </a:p>
         </p:txBody>
       </p:sp>
-      <p:cxnSp>
-        <p:nvCxnSpPr>
-          <p:cNvPr id="3" name="C4-E27 arrow 1" descr="sci-ppt:o001"/>
-          <p:cNvCxnSpPr/>
+      <p:sp>
+        <p:nvSpPr>
+          <p:cNvPr id="3" name="C4-E27 text 1" descr="sci-ppt:o001"/>
+          <p:cNvSpPr txBox="1"/>
           <p:nvPr/>
-        </p:nvCxnSpPr>
+        </p:nvSpPr>
         <p:spPr>
           <a:xfrm>
-            <a:off x="1005840" y="3246120"/>
-            <a:ext cx="9875520" cy="0"/>
-          </a:xfrm>
-          <a:prstGeom prst="line">
-            <a:avLst/>
-          </a:prstGeom>
-          <a:ln w="25400">
-            <a:solidFill>
-              <a:srgbClr val="8EDBD4"/>
-            </a:solidFill>
-            <a:headEnd type="none" w="med" len="med"/>
-            <a:tailEnd type="triangle" w="med" len="med"/>
-          </a:ln>
-          <a:effectLst/>
-        </p:spPr>
-      </p:cxnSp>
-      <p:cxnSp>
-        <p:nvCxnSpPr>
-          <p:cNvPr id="4" name="C4-E27 arrow 2" descr="sci-ppt:o002"/>
-          <p:cNvCxnSpPr/>
-          <p:nvPr/>
-        </p:nvCxnSpPr>
-        <p:spPr>
-          <a:xfrm flipV="1">
-            <a:off x="1097280" y="822960"/>
-            <a:ext cx="0" cy="2468880"/>
-          </a:xfrm>
-          <a:prstGeom prst="line">
-            <a:avLst/>
-          </a:prstGeom>
-          <a:ln w="25400">
-            <a:solidFill>
-              <a:srgbClr val="8EDBD4"/>
-            </a:solidFill>
-            <a:headEnd type="none" w="med" len="med"/>
-            <a:tailEnd type="triangle" w="med" len="med"/>
-          </a:ln>
-          <a:effectLst/>
-        </p:spPr>
-      </p:cxnSp>
-      <p:cxnSp>
-        <p:nvCxnSpPr>
-          <p:cNvPr id="5" name="C4-E27 line 3" descr="sci-ppt:o003"/>
-          <p:cNvCxnSpPr/>
-          <p:nvPr/>
-        </p:nvCxnSpPr>
-        <p:spPr>
-          <a:xfrm flipV="1">
-            <a:off x="1097280" y="1143000"/>
-            <a:ext cx="2560320" cy="2103120"/>
-          </a:xfrm>
-          <a:prstGeom prst="line">
-            <a:avLst/>
-          </a:prstGeom>
-          <a:ln w="25400">
-            <a:solidFill>
-              <a:srgbClr val="8EDBD4"/>
-            </a:solidFill>
-          </a:ln>
-          <a:effectLst/>
-        </p:spPr>
-      </p:cxnSp>
-      <p:cxnSp>
-        <p:nvCxnSpPr>
-          <p:cNvPr id="6" name="C4-E27 line 4" descr="sci-ppt:o004"/>
-          <p:cNvCxnSpPr/>
-          <p:nvPr/>
-        </p:nvCxnSpPr>
-        <p:spPr>
-          <a:xfrm>
-            <a:off x="3657600" y="1143000"/>
-            <a:ext cx="6217920" cy="2103120"/>
-          </a:xfrm>
-          <a:prstGeom prst="line">
-            <a:avLst/>
-          </a:prstGeom>
-          <a:ln w="25400">
-            <a:solidFill>
-              <a:srgbClr val="8EDBD4"/>
-            </a:solidFill>
-          </a:ln>
-          <a:effectLst/>
-        </p:spPr>
-      </p:cxnSp>
-      <p:cxnSp>
-        <p:nvCxnSpPr>
-          <p:cNvPr id="7" name="C4-E27 line 5" descr="sci-ppt:o005"/>
-          <p:cNvCxnSpPr/>
-          <p:nvPr/>
-        </p:nvCxnSpPr>
-        <p:spPr>
-          <a:xfrm>
-            <a:off x="3657600" y="1143000"/>
-            <a:ext cx="0" cy="2103120"/>
-          </a:xfrm>
-          <a:prstGeom prst="line">
-            <a:avLst/>
-          </a:prstGeom>
-          <a:ln w="25400">
-            <a:solidFill>
-              <a:srgbClr val="B4C7D2"/>
-            </a:solidFill>
-          </a:ln>
-          <a:effectLst/>
-        </p:spPr>
-      </p:cxnSp>
-      <p:sp>
-        <p:nvSpPr>
-          <p:cNvPr id="8" name="C4-E27 text 6" descr="sci-ppt:o006"/>
-          <p:cNvSpPr txBox="1"/>
-          <p:nvPr/>
-        </p:nvSpPr>
-        <p:spPr>
-          <a:xfrm>
-            <a:off x="320040" y="640080"/>
-            <a:ext cx="2743200" cy="365760"/>
+            <a:off x="457200" y="914400"/>
+            <a:ext cx="11247120" cy="254889"/>
           </a:xfrm>
           <a:prstGeom prst="rect">
             <a:avLst/>
@@ -3268,7 +3154,7 @@
           <a:effectLst/>
         </p:spPr>
         <p:txBody>
-          <a:bodyPr wrap="square" lIns="27432" rIns="27432" tIns="18288" bIns="18288" anchor="ctr">
+          <a:bodyPr wrap="none" lIns="18288" rIns="18288" tIns="18288" bIns="18288" anchor="t">
             <a:spAutoFit/>
           </a:bodyPr>
           <a:lstStyle/>
@@ -3279,27 +3165,59 @@
               </a:spcAft>
             </a:pPr>
             <a:r>
-              <a:rPr sz="1700" b="0" i="0">
+              <a:rPr sz="1350" b="1" i="0">
                 <a:solidFill>
-                  <a:srgbClr val="E7F0F3"/>
+                  <a:srgbClr val="8EDBD4"/>
                 </a:solidFill>
                 <a:latin typeface="Arial"/>
               </a:rPr>
-              <a:t>t_n: tensile resistance</a:t>
-            </a:r>
-          </a:p>
-        </p:txBody>
-      </p:sp>
-      <p:sp>
-        <p:nvSpPr>
-          <p:cNvPr id="9" name="C4-E27 text 7" descr="sci-ppt:o007"/>
+              <a:t>Cohesive admissibility check with the teaching numbers</a:t>
+            </a:r>
+          </a:p>
+        </p:txBody>
+      </p:sp>
+      <p:sp>
+        <p:nvSpPr>
+          <p:cNvPr id="4" name="C4-E27 round_rect 2" descr="sci-ppt:o002"/>
+          <p:cNvSpPr/>
+          <p:nvPr/>
+        </p:nvSpPr>
+        <p:spPr>
+          <a:xfrm>
+            <a:off x="457200" y="1371600"/>
+            <a:ext cx="3611880" cy="1920240"/>
+          </a:xfrm>
+          <a:prstGeom prst="roundRect">
+            <a:avLst/>
+          </a:prstGeom>
+          <a:solidFill>
+            <a:srgbClr val="213E4B"/>
+          </a:solidFill>
+          <a:ln w="20320">
+            <a:solidFill>
+              <a:srgbClr val="B4C7D2"/>
+            </a:solidFill>
+          </a:ln>
+          <a:effectLst/>
+        </p:spPr>
+        <p:txBody>
+          <a:bodyPr rtlCol="0" anchor="ctr"/>
+          <a:lstStyle/>
+          <a:p>
+            <a:pPr algn="ctr"/>
+          </a:p>
+        </p:txBody>
+      </p:sp>
+      <p:sp>
+        <p:nvSpPr>
+          <p:cNvPr id="5" name="C4-E27 text 3" descr="sci-ppt:o003"/>
           <p:cNvSpPr txBox="1"/>
           <p:nvPr/>
         </p:nvSpPr>
         <p:spPr>
           <a:xfrm>
-            <a:off x="3794760" y="914400"/>
-            <a:ext cx="2743200" cy="365760"/>
+            <a:off x="566928" y="1426464"/>
+            <a:ext cx="3392424" cy="247142"/>
           </a:xfrm>
           <a:prstGeom prst="rect">
             <a:avLst/>
@@ -3308,7 +3226,7 @@
           <a:effectLst/>
         </p:spPr>
         <p:txBody>
-          <a:bodyPr wrap="square" lIns="27432" rIns="27432" tIns="18288" bIns="18288" anchor="ctr">
+          <a:bodyPr wrap="none" lIns="18288" rIns="18288" tIns="18288" bIns="18288" anchor="t">
             <a:spAutoFit/>
           </a:bodyPr>
           <a:lstStyle/>
@@ -3319,27 +3237,27 @@
               </a:spcAft>
             </a:pPr>
             <a:r>
-              <a:rPr sz="1800" b="0" i="0">
+              <a:rPr sz="1300" b="1" i="0">
                 <a:solidFill>
-                  <a:srgbClr val="E7F0F3"/>
+                  <a:srgbClr val="B4C7D2"/>
                 </a:solidFill>
                 <a:latin typeface="Arial"/>
               </a:rPr>
-              <a:t>T_max</a:t>
-            </a:r>
-          </a:p>
-        </p:txBody>
-      </p:sp>
-      <p:sp>
-        <p:nvSpPr>
-          <p:cNvPr id="10" name="C4-E27 text 8" descr="sci-ppt:o008"/>
+              <a:t>given</a:t>
+            </a:r>
+          </a:p>
+        </p:txBody>
+      </p:sp>
+      <p:sp>
+        <p:nvSpPr>
+          <p:cNvPr id="6" name="C4-E27 text 4" descr="sci-ppt:o004"/>
           <p:cNvSpPr txBox="1"/>
           <p:nvPr/>
         </p:nvSpPr>
         <p:spPr>
           <a:xfrm>
-            <a:off x="3337560" y="3429000"/>
-            <a:ext cx="1828800" cy="274320"/>
+            <a:off x="594360" y="1920240"/>
+            <a:ext cx="3383280" cy="626745"/>
           </a:xfrm>
           <a:prstGeom prst="rect">
             <a:avLst/>
@@ -3348,38 +3266,102 @@
           <a:effectLst/>
         </p:spPr>
         <p:txBody>
-          <a:bodyPr wrap="square" lIns="27432" rIns="27432" tIns="18288" bIns="18288" anchor="ctr">
+          <a:bodyPr wrap="none" lIns="18288" rIns="18288" tIns="18288" bIns="18288" anchor="t">
             <a:spAutoFit/>
           </a:bodyPr>
           <a:lstStyle/>
           <a:p>
-            <a:pPr algn="l">
+            <a:pPr algn="ctr">
               <a:spcAft>
                 <a:spcPts val="0"/>
               </a:spcAft>
             </a:pPr>
             <a:r>
-              <a:rPr sz="1800" b="0" i="0">
+              <a:rPr sz="1250" b="1" i="0">
                 <a:solidFill>
                   <a:srgbClr val="E7F0F3"/>
                 </a:solidFill>
                 <a:latin typeface="Arial"/>
               </a:rPr>
-              <a:t>δ₀</a:t>
-            </a:r>
-          </a:p>
-        </p:txBody>
-      </p:sp>
-      <p:sp>
-        <p:nvSpPr>
-          <p:cNvPr id="11" name="C4-E27 text 9" descr="sci-ppt:o009"/>
+              <a:t>Γ = 0.005 J/m²</a:t>
+            </a:r>
+          </a:p>
+          <a:p>
+            <a:pPr algn="ctr">
+              <a:spcAft>
+                <a:spcPts val="0"/>
+              </a:spcAft>
+            </a:pPr>
+            <a:r>
+              <a:rPr sz="1250" b="1" i="0">
+                <a:solidFill>
+                  <a:srgbClr val="E7F0F3"/>
+                </a:solidFill>
+                <a:latin typeface="Arial"/>
+              </a:rPr>
+              <a:t>Tₘₐₓ = 0.10 MPa</a:t>
+            </a:r>
+          </a:p>
+          <a:p>
+            <a:pPr algn="ctr">
+              <a:spcAft>
+                <a:spcPts val="0"/>
+              </a:spcAft>
+            </a:pPr>
+            <a:r>
+              <a:rPr sz="1250" b="1" i="0">
+                <a:solidFill>
+                  <a:srgbClr val="E7F0F3"/>
+                </a:solidFill>
+                <a:latin typeface="Arial"/>
+              </a:rPr>
+              <a:t>Kₙ = 10¹³ Pa/m</a:t>
+            </a:r>
+          </a:p>
+        </p:txBody>
+      </p:sp>
+      <p:sp>
+        <p:nvSpPr>
+          <p:cNvPr id="7" name="C4-E27 round_rect 5" descr="sci-ppt:o005"/>
+          <p:cNvSpPr/>
+          <p:nvPr/>
+        </p:nvSpPr>
+        <p:spPr>
+          <a:xfrm>
+            <a:off x="4251960" y="1371600"/>
+            <a:ext cx="3611880" cy="1920240"/>
+          </a:xfrm>
+          <a:prstGeom prst="roundRect">
+            <a:avLst/>
+          </a:prstGeom>
+          <a:solidFill>
+            <a:srgbClr val="213E4B"/>
+          </a:solidFill>
+          <a:ln w="20320">
+            <a:solidFill>
+              <a:srgbClr val="7FC8F8"/>
+            </a:solidFill>
+          </a:ln>
+          <a:effectLst/>
+        </p:spPr>
+        <p:txBody>
+          <a:bodyPr rtlCol="0" anchor="ctr"/>
+          <a:lstStyle/>
+          <a:p>
+            <a:pPr algn="ctr"/>
+          </a:p>
+        </p:txBody>
+      </p:sp>
+      <p:sp>
+        <p:nvSpPr>
+          <p:cNvPr id="8" name="C4-E27 text 6" descr="sci-ppt:o006"/>
           <p:cNvSpPr txBox="1"/>
           <p:nvPr/>
         </p:nvSpPr>
         <p:spPr>
           <a:xfrm>
-            <a:off x="9646920" y="3429000"/>
-            <a:ext cx="1280160" cy="274320"/>
+            <a:off x="4361688" y="1426464"/>
+            <a:ext cx="3392424" cy="247142"/>
           </a:xfrm>
           <a:prstGeom prst="rect">
             <a:avLst/>
@@ -3388,7 +3370,7 @@
           <a:effectLst/>
         </p:spPr>
         <p:txBody>
-          <a:bodyPr wrap="square" lIns="27432" rIns="27432" tIns="18288" bIns="18288" anchor="ctr">
+          <a:bodyPr wrap="none" lIns="18288" rIns="18288" tIns="18288" bIns="18288" anchor="t">
             <a:spAutoFit/>
           </a:bodyPr>
           <a:lstStyle/>
@@ -3399,27 +3381,27 @@
               </a:spcAft>
             </a:pPr>
             <a:r>
-              <a:rPr sz="1800" b="0" i="0">
+              <a:rPr sz="1300" b="1" i="0">
                 <a:solidFill>
-                  <a:srgbClr val="E7F0F3"/>
+                  <a:srgbClr val="7FC8F8"/>
                 </a:solidFill>
                 <a:latin typeface="Arial"/>
               </a:rPr>
-              <a:t>δ_c</a:t>
-            </a:r>
-          </a:p>
-        </p:txBody>
-      </p:sp>
-      <p:sp>
-        <p:nvSpPr>
-          <p:cNvPr id="12" name="C4-E27 text 10" descr="sci-ppt:o010"/>
+              <a:t>δ₀ = Tₘₐₓ / Kₙ</a:t>
+            </a:r>
+          </a:p>
+        </p:txBody>
+      </p:sp>
+      <p:sp>
+        <p:nvSpPr>
+          <p:cNvPr id="9" name="C4-E27 text 7" descr="sci-ppt:o007"/>
           <p:cNvSpPr txBox="1"/>
           <p:nvPr/>
         </p:nvSpPr>
         <p:spPr>
           <a:xfrm>
-            <a:off x="10789920" y="3429000"/>
-            <a:ext cx="914400" cy="274320"/>
+            <a:off x="4389120" y="1920240"/>
+            <a:ext cx="3383280" cy="239395"/>
           </a:xfrm>
           <a:prstGeom prst="rect">
             <a:avLst/>
@@ -3428,38 +3410,70 @@
           <a:effectLst/>
         </p:spPr>
         <p:txBody>
-          <a:bodyPr wrap="square" lIns="27432" rIns="27432" tIns="18288" bIns="18288" anchor="ctr">
+          <a:bodyPr wrap="none" lIns="18288" rIns="18288" tIns="18288" bIns="18288" anchor="t">
             <a:spAutoFit/>
           </a:bodyPr>
           <a:lstStyle/>
           <a:p>
-            <a:pPr algn="l">
+            <a:pPr algn="ctr">
               <a:spcAft>
                 <a:spcPts val="0"/>
               </a:spcAft>
             </a:pPr>
             <a:r>
-              <a:rPr sz="1800" b="0" i="0">
+              <a:rPr sz="1250" b="1" i="0">
                 <a:solidFill>
                   <a:srgbClr val="E7F0F3"/>
                 </a:solidFill>
                 <a:latin typeface="Arial"/>
               </a:rPr>
-              <a:t>δ</a:t>
-            </a:r>
-          </a:p>
-        </p:txBody>
-      </p:sp>
-      <p:sp>
-        <p:nvSpPr>
-          <p:cNvPr id="13" name="C4-E27 text 11" descr="sci-ppt:o011"/>
+              <a:t>10⁵ / 10¹³ = 1.0×10⁻⁸ m = 10 nm</a:t>
+            </a:r>
+          </a:p>
+        </p:txBody>
+      </p:sp>
+      <p:sp>
+        <p:nvSpPr>
+          <p:cNvPr id="10" name="C4-E27 round_rect 8" descr="sci-ppt:o008"/>
+          <p:cNvSpPr/>
+          <p:nvPr/>
+        </p:nvSpPr>
+        <p:spPr>
+          <a:xfrm>
+            <a:off x="8046720" y="1371600"/>
+            <a:ext cx="3611880" cy="1920240"/>
+          </a:xfrm>
+          <a:prstGeom prst="roundRect">
+            <a:avLst/>
+          </a:prstGeom>
+          <a:solidFill>
+            <a:srgbClr val="213E4B"/>
+          </a:solidFill>
+          <a:ln w="20320">
+            <a:solidFill>
+              <a:srgbClr val="F28BA0"/>
+            </a:solidFill>
+          </a:ln>
+          <a:effectLst/>
+        </p:spPr>
+        <p:txBody>
+          <a:bodyPr rtlCol="0" anchor="ctr"/>
+          <a:lstStyle/>
+          <a:p>
+            <a:pPr algn="ctr"/>
+          </a:p>
+        </p:txBody>
+      </p:sp>
+      <p:sp>
+        <p:nvSpPr>
+          <p:cNvPr id="11" name="C4-E27 text 9" descr="sci-ppt:o009"/>
           <p:cNvSpPr txBox="1"/>
           <p:nvPr/>
         </p:nvSpPr>
         <p:spPr>
           <a:xfrm>
-            <a:off x="4754880" y="2377440"/>
-            <a:ext cx="4572000" cy="411480"/>
+            <a:off x="8156448" y="1426464"/>
+            <a:ext cx="3392424" cy="247142"/>
           </a:xfrm>
           <a:prstGeom prst="rect">
             <a:avLst/>
@@ -3468,7 +3482,7 @@
           <a:effectLst/>
         </p:spPr>
         <p:txBody>
-          <a:bodyPr wrap="square" lIns="27432" rIns="27432" tIns="18288" bIns="18288" anchor="ctr">
+          <a:bodyPr wrap="none" lIns="18288" rIns="18288" tIns="18288" bIns="18288" anchor="t">
             <a:spAutoFit/>
           </a:bodyPr>
           <a:lstStyle/>
@@ -3479,27 +3493,27 @@
               </a:spcAft>
             </a:pPr>
             <a:r>
-              <a:rPr sz="2000" b="0" i="0">
+              <a:rPr sz="1300" b="1" i="0">
                 <a:solidFill>
-                  <a:srgbClr val="8EDBD4"/>
+                  <a:srgbClr val="F28BA0"/>
                 </a:solidFill>
                 <a:latin typeface="Arial"/>
               </a:rPr>
-              <a:t>Full area = Γ</a:t>
-            </a:r>
-          </a:p>
-        </p:txBody>
-      </p:sp>
-      <p:sp>
-        <p:nvSpPr>
-          <p:cNvPr id="14" name="C4-E27 text 12" descr="sci-ppt:o012"/>
+              <a:t>δ_c = 2Γ / Tₘₐₓ</a:t>
+            </a:r>
+          </a:p>
+        </p:txBody>
+      </p:sp>
+      <p:sp>
+        <p:nvSpPr>
+          <p:cNvPr id="12" name="C4-E27 text 10" descr="sci-ppt:o010"/>
           <p:cNvSpPr txBox="1"/>
           <p:nvPr/>
         </p:nvSpPr>
         <p:spPr>
           <a:xfrm>
-            <a:off x="5943600" y="731520"/>
-            <a:ext cx="4572000" cy="365760"/>
+            <a:off x="8183880" y="1920240"/>
+            <a:ext cx="3383280" cy="239395"/>
           </a:xfrm>
           <a:prstGeom prst="rect">
             <a:avLst/>
@@ -3508,60 +3522,38 @@
           <a:effectLst/>
         </p:spPr>
         <p:txBody>
-          <a:bodyPr wrap="square" lIns="27432" rIns="27432" tIns="18288" bIns="18288" anchor="ctr">
+          <a:bodyPr wrap="none" lIns="18288" rIns="18288" tIns="18288" bIns="18288" anchor="t">
             <a:spAutoFit/>
           </a:bodyPr>
           <a:lstStyle/>
           <a:p>
-            <a:pPr algn="l">
+            <a:pPr algn="ctr">
               <a:spcAft>
                 <a:spcPts val="0"/>
               </a:spcAft>
             </a:pPr>
             <a:r>
-              <a:rPr sz="1700" b="0" i="0">
+              <a:rPr sz="1250" b="1" i="0">
                 <a:solidFill>
                   <a:srgbClr val="E7F0F3"/>
                 </a:solidFill>
                 <a:latin typeface="Arial"/>
               </a:rPr>
-              <a:t>Monotonic tensile opening branch</a:t>
-            </a:r>
-          </a:p>
-        </p:txBody>
-      </p:sp>
-      <p:cxnSp>
-        <p:nvCxnSpPr>
-          <p:cNvPr id="15" name="C4-E27 line 13" descr="sci-ppt:o013"/>
-          <p:cNvCxnSpPr/>
+              <a:t>2(0.005) / 10⁵ = 1.0×10⁻⁷ m = 100 nm</a:t>
+            </a:r>
+          </a:p>
+        </p:txBody>
+      </p:sp>
+      <p:sp>
+        <p:nvSpPr>
+          <p:cNvPr id="13" name="C4-E27 text 11" descr="sci-ppt:o011"/>
+          <p:cNvSpPr txBox="1"/>
           <p:nvPr/>
-        </p:nvCxnSpPr>
+        </p:nvSpPr>
         <p:spPr>
           <a:xfrm>
-            <a:off x="274320" y="3977639"/>
-            <a:ext cx="11612880" cy="0"/>
-          </a:xfrm>
-          <a:prstGeom prst="line">
-            <a:avLst/>
-          </a:prstGeom>
-          <a:ln w="12700">
-            <a:solidFill>
-              <a:srgbClr val="405967"/>
-            </a:solidFill>
-          </a:ln>
-          <a:effectLst/>
-        </p:spPr>
-      </p:cxnSp>
-      <p:sp>
-        <p:nvSpPr>
-          <p:cNvPr id="16" name="C4-E27 text 14" descr="sci-ppt:o014"/>
-          <p:cNvSpPr txBox="1"/>
-          <p:nvPr/>
-        </p:nvSpPr>
-        <p:spPr>
-          <a:xfrm>
-            <a:off x="320040" y="4096512"/>
-            <a:ext cx="5715000" cy="246888"/>
+            <a:off x="457200" y="3675887"/>
+            <a:ext cx="1920240" cy="239395"/>
           </a:xfrm>
           <a:prstGeom prst="rect">
             <a:avLst/>
@@ -3570,7 +3562,7 @@
           <a:effectLst/>
         </p:spPr>
         <p:txBody>
-          <a:bodyPr wrap="square" lIns="27432" rIns="27432" tIns="18288" bIns="18288" anchor="ctr">
+          <a:bodyPr wrap="none" lIns="18288" rIns="18288" tIns="18288" bIns="18288" anchor="t">
             <a:spAutoFit/>
           </a:bodyPr>
           <a:lstStyle/>
@@ -3581,27 +3573,63 @@
               </a:spcAft>
             </a:pPr>
             <a:r>
-              <a:rPr sz="1150" b="0" i="0">
+              <a:rPr sz="1250" b="0" i="0">
                 <a:solidFill>
-                  <a:srgbClr val="B4C7D2"/>
+                  <a:srgbClr val="E7F0F3"/>
                 </a:solidFill>
                 <a:latin typeface="Arial"/>
               </a:rPr>
-              <a:t>• T_max = 0.10 MPa — curve peak</a:t>
-            </a:r>
-          </a:p>
-        </p:txBody>
-      </p:sp>
-      <p:sp>
-        <p:nvSpPr>
-          <p:cNvPr id="17" name="C4-E27 text 15" descr="sci-ppt:o015"/>
+              <a:t>δ₀  (peak)</a:t>
+            </a:r>
+          </a:p>
+        </p:txBody>
+      </p:sp>
+      <p:sp>
+        <p:nvSpPr>
+          <p:cNvPr id="14" name="C4-E27 rect 12" descr="sci-ppt:o012"/>
+          <p:cNvSpPr/>
+          <p:nvPr/>
+        </p:nvSpPr>
+        <p:spPr>
+          <a:xfrm>
+            <a:off x="2468880" y="3657600"/>
+            <a:ext cx="662940" cy="411480"/>
+          </a:xfrm>
+          <a:prstGeom prst="rect">
+            <a:avLst/>
+          </a:prstGeom>
+          <a:solidFill>
+            <a:srgbClr val="F2B880">
+              <a:alpha val="85000"/>
+            </a:srgbClr>
+          </a:solidFill>
+          <a:ln w="12700">
+            <a:solidFill>
+              <a:srgbClr val="F2B880">
+                <a:alpha val="85000"/>
+              </a:srgbClr>
+            </a:solidFill>
+          </a:ln>
+          <a:effectLst/>
+        </p:spPr>
+        <p:txBody>
+          <a:bodyPr rtlCol="0" anchor="ctr"/>
+          <a:lstStyle/>
+          <a:p>
+            <a:pPr algn="ctr"/>
+          </a:p>
+        </p:txBody>
+      </p:sp>
+      <p:sp>
+        <p:nvSpPr>
+          <p:cNvPr id="15" name="C4-E27 text 13" descr="sci-ppt:o013"/>
           <p:cNvSpPr txBox="1"/>
           <p:nvPr/>
         </p:nvSpPr>
         <p:spPr>
           <a:xfrm>
-            <a:off x="6217920" y="4096512"/>
-            <a:ext cx="5715000" cy="246888"/>
+            <a:off x="3204972" y="3703320"/>
+            <a:ext cx="1371600" cy="239395"/>
           </a:xfrm>
           <a:prstGeom prst="rect">
             <a:avLst/>
@@ -3610,7 +3638,7 @@
           <a:effectLst/>
         </p:spPr>
         <p:txBody>
-          <a:bodyPr wrap="square" lIns="27432" rIns="27432" tIns="18288" bIns="18288" anchor="ctr">
+          <a:bodyPr wrap="none" lIns="18288" rIns="18288" tIns="18288" bIns="18288" anchor="t">
             <a:spAutoFit/>
           </a:bodyPr>
           <a:lstStyle/>
@@ -3621,27 +3649,27 @@
               </a:spcAft>
             </a:pPr>
             <a:r>
-              <a:rPr sz="1150" b="0" i="0">
+              <a:rPr sz="1250" b="1" i="0">
                 <a:solidFill>
-                  <a:srgbClr val="B4C7D2"/>
+                  <a:srgbClr val="E7F0F3"/>
                 </a:solidFill>
                 <a:latin typeface="Arial"/>
               </a:rPr>
-              <a:t>• K_n = 10¹³ Pa/m — initial slope</a:t>
-            </a:r>
-          </a:p>
-        </p:txBody>
-      </p:sp>
-      <p:sp>
-        <p:nvSpPr>
-          <p:cNvPr id="18" name="C4-E27 text 16" descr="sci-ppt:o016"/>
+              <a:t>10 nm</a:t>
+            </a:r>
+          </a:p>
+        </p:txBody>
+      </p:sp>
+      <p:sp>
+        <p:nvSpPr>
+          <p:cNvPr id="16" name="C4-E27 text 14" descr="sci-ppt:o014"/>
           <p:cNvSpPr txBox="1"/>
           <p:nvPr/>
         </p:nvSpPr>
         <p:spPr>
           <a:xfrm>
-            <a:off x="320040" y="4329684"/>
-            <a:ext cx="5715000" cy="246888"/>
+            <a:off x="457200" y="4315968"/>
+            <a:ext cx="1920240" cy="239395"/>
           </a:xfrm>
           <a:prstGeom prst="rect">
             <a:avLst/>
@@ -3650,7 +3678,7 @@
           <a:effectLst/>
         </p:spPr>
         <p:txBody>
-          <a:bodyPr wrap="square" lIns="27432" rIns="27432" tIns="18288" bIns="18288" anchor="ctr">
+          <a:bodyPr wrap="none" lIns="18288" rIns="18288" tIns="18288" bIns="18288" anchor="t">
             <a:spAutoFit/>
           </a:bodyPr>
           <a:lstStyle/>
@@ -3661,27 +3689,63 @@
               </a:spcAft>
             </a:pPr>
             <a:r>
-              <a:rPr sz="1150" b="0" i="0">
+              <a:rPr sz="1250" b="0" i="0">
                 <a:solidFill>
-                  <a:srgbClr val="B4C7D2"/>
+                  <a:srgbClr val="E7F0F3"/>
                 </a:solidFill>
                 <a:latin typeface="Arial"/>
               </a:rPr>
-              <a:t>• δ₀ = 10 nm</a:t>
-            </a:r>
-          </a:p>
-        </p:txBody>
-      </p:sp>
-      <p:sp>
-        <p:nvSpPr>
-          <p:cNvPr id="19" name="C4-E27 text 17" descr="sci-ppt:o017"/>
+              <a:t>δ_c  (final)</a:t>
+            </a:r>
+          </a:p>
+        </p:txBody>
+      </p:sp>
+      <p:sp>
+        <p:nvSpPr>
+          <p:cNvPr id="17" name="C4-E27 rect 15" descr="sci-ppt:o015"/>
+          <p:cNvSpPr/>
+          <p:nvPr/>
+        </p:nvSpPr>
+        <p:spPr>
+          <a:xfrm>
+            <a:off x="2468880" y="4297680"/>
+            <a:ext cx="6629400" cy="411480"/>
+          </a:xfrm>
+          <a:prstGeom prst="rect">
+            <a:avLst/>
+          </a:prstGeom>
+          <a:solidFill>
+            <a:srgbClr val="F28BA0">
+              <a:alpha val="85000"/>
+            </a:srgbClr>
+          </a:solidFill>
+          <a:ln w="12700">
+            <a:solidFill>
+              <a:srgbClr val="F28BA0">
+                <a:alpha val="85000"/>
+              </a:srgbClr>
+            </a:solidFill>
+          </a:ln>
+          <a:effectLst/>
+        </p:spPr>
+        <p:txBody>
+          <a:bodyPr rtlCol="0" anchor="ctr"/>
+          <a:lstStyle/>
+          <a:p>
+            <a:pPr algn="ctr"/>
+          </a:p>
+        </p:txBody>
+      </p:sp>
+      <p:sp>
+        <p:nvSpPr>
+          <p:cNvPr id="18" name="C4-E27 text 16" descr="sci-ppt:o016"/>
           <p:cNvSpPr txBox="1"/>
           <p:nvPr/>
         </p:nvSpPr>
         <p:spPr>
           <a:xfrm>
-            <a:off x="6217920" y="4329684"/>
-            <a:ext cx="5715000" cy="246888"/>
+            <a:off x="9171432" y="4343400"/>
+            <a:ext cx="1371600" cy="239395"/>
           </a:xfrm>
           <a:prstGeom prst="rect">
             <a:avLst/>
@@ -3690,7 +3754,7 @@
           <a:effectLst/>
         </p:spPr>
         <p:txBody>
-          <a:bodyPr wrap="square" lIns="27432" rIns="27432" tIns="18288" bIns="18288" anchor="ctr">
+          <a:bodyPr wrap="none" lIns="18288" rIns="18288" tIns="18288" bIns="18288" anchor="t">
             <a:spAutoFit/>
           </a:bodyPr>
           <a:lstStyle/>
@@ -3701,27 +3765,27 @@
               </a:spcAft>
             </a:pPr>
             <a:r>
-              <a:rPr sz="1150" b="0" i="0">
+              <a:rPr sz="1250" b="1" i="0">
                 <a:solidFill>
-                  <a:srgbClr val="B4C7D2"/>
+                  <a:srgbClr val="E7F0F3"/>
                 </a:solidFill>
                 <a:latin typeface="Arial"/>
               </a:rPr>
-              <a:t>• δ_c = 100 nm</a:t>
-            </a:r>
-          </a:p>
-        </p:txBody>
-      </p:sp>
-      <p:sp>
-        <p:nvSpPr>
-          <p:cNvPr id="20" name="C4-E27 text 18" descr="sci-ppt:o018"/>
+              <a:t>100 nm</a:t>
+            </a:r>
+          </a:p>
+        </p:txBody>
+      </p:sp>
+      <p:sp>
+        <p:nvSpPr>
+          <p:cNvPr id="19" name="C4-E27 text 17" descr="sci-ppt:o017"/>
           <p:cNvSpPr txBox="1"/>
           <p:nvPr/>
         </p:nvSpPr>
         <p:spPr>
           <a:xfrm>
-            <a:off x="320040" y="4562856"/>
-            <a:ext cx="5715000" cy="246888"/>
+            <a:off x="457200" y="4937760"/>
+            <a:ext cx="11247120" cy="247142"/>
           </a:xfrm>
           <a:prstGeom prst="rect">
             <a:avLst/>
@@ -3730,7 +3794,7 @@
           <a:effectLst/>
         </p:spPr>
         <p:txBody>
-          <a:bodyPr wrap="square" lIns="27432" rIns="27432" tIns="18288" bIns="18288" anchor="ctr">
+          <a:bodyPr wrap="none" lIns="18288" rIns="18288" tIns="18288" bIns="18288" anchor="t">
             <a:spAutoFit/>
           </a:bodyPr>
           <a:lstStyle/>
@@ -3741,27 +3805,27 @@
               </a:spcAft>
             </a:pPr>
             <a:r>
-              <a:rPr sz="1150" b="0" i="0">
+              <a:rPr sz="1300" b="0" i="0">
                 <a:solidFill>
-                  <a:srgbClr val="B4C7D2"/>
+                  <a:srgbClr val="F2B880"/>
                 </a:solidFill>
                 <a:latin typeface="Arial"/>
               </a:rPr>
-              <a:t>• Γ = 0.005 J/m² — curve area</a:t>
-            </a:r>
-          </a:p>
-        </p:txBody>
-      </p:sp>
-      <p:sp>
-        <p:nvSpPr>
-          <p:cNvPr id="21" name="C4-E27 text 19" descr="sci-ppt:o019"/>
+              <a:t>δ_c is ten times δ₀: the law has a distinct softening stage, so it is admissible (δ₀ &lt; δ_c).</a:t>
+            </a:r>
+          </a:p>
+        </p:txBody>
+      </p:sp>
+      <p:sp>
+        <p:nvSpPr>
+          <p:cNvPr id="20" name="C4-E27 text 18" descr="sci-ppt:o018"/>
           <p:cNvSpPr txBox="1"/>
           <p:nvPr/>
         </p:nvSpPr>
         <p:spPr>
           <a:xfrm>
-            <a:off x="320040" y="5596128"/>
-            <a:ext cx="11430000" cy="292608"/>
+            <a:off x="457200" y="5486400"/>
+            <a:ext cx="11247120" cy="231648"/>
           </a:xfrm>
           <a:prstGeom prst="rect">
             <a:avLst/>
@@ -3770,7 +3834,7 @@
           <a:effectLst/>
         </p:spPr>
         <p:txBody>
-          <a:bodyPr wrap="square" lIns="27432" rIns="27432" tIns="18288" bIns="18288" anchor="ctr">
+          <a:bodyPr wrap="none" lIns="18288" rIns="18288" tIns="18288" bIns="18288" anchor="t">
             <a:spAutoFit/>
           </a:bodyPr>
           <a:lstStyle/>
@@ -3781,27 +3845,27 @@
               </a:spcAft>
             </a:pPr>
             <a:r>
-              <a:rPr sz="1150" b="0" i="0">
+              <a:rPr sz="1200" b="0" i="0">
                 <a:solidFill>
-                  <a:srgbClr val="8EDBD4"/>
+                  <a:srgbClr val="B4C7D2"/>
                 </a:solidFill>
                 <a:latin typeface="Arial"/>
               </a:rPr>
-              <a:t>10 nm &lt; 100 nm: the softening interval is admissible.</a:t>
-            </a:r>
-          </a:p>
-        </p:txBody>
-      </p:sp>
-      <p:sp>
-        <p:nvSpPr>
-          <p:cNvPr id="22" name="C4-E27 text 20" descr="sci-ppt:o020"/>
+              <a:t>These are stipulated teaching values, not measured properties of a real interface.</a:t>
+            </a:r>
+          </a:p>
+        </p:txBody>
+      </p:sp>
+      <p:sp>
+        <p:nvSpPr>
+          <p:cNvPr id="21" name="C4-E27 text 19" descr="sci-ppt:o019"/>
           <p:cNvSpPr txBox="1"/>
           <p:nvPr/>
         </p:nvSpPr>
         <p:spPr>
           <a:xfrm>
-            <a:off x="320040" y="6473952"/>
-            <a:ext cx="11430000" cy="256032"/>
+            <a:off x="320040" y="6510528"/>
+            <a:ext cx="11521440" cy="200660"/>
           </a:xfrm>
           <a:prstGeom prst="rect">
             <a:avLst/>
@@ -3810,7 +3874,7 @@
           <a:effectLst/>
         </p:spPr>
         <p:txBody>
-          <a:bodyPr wrap="square" lIns="27432" rIns="27432" tIns="18288" bIns="18288" anchor="ctr">
+          <a:bodyPr wrap="none" lIns="18288" rIns="18288" tIns="18288" bIns="18288" anchor="t">
             <a:spAutoFit/>
           </a:bodyPr>
           <a:lstStyle/>
@@ -3827,7 +3891,7 @@
                 </a:solidFill>
                 <a:latin typeface="Arial"/>
               </a:rPr>
-              <a:t>Model schematic; geometry is not to scale.</a:t>
+              <a:t>Admissibility calculation of Eq. C4-E27.</a:t>
             </a:r>
           </a:p>
         </p:txBody>
